--- a/해성DS 3Layer.pptx
+++ b/해성DS 3Layer.pptx
@@ -303,7 +303,7 @@
           <a:p>
             <a:fld id="{E660A6C9-7901-4DAA-A3D7-27A356FD03BF}" type="datetimeFigureOut">
               <a:rPr lang="ko-KR" altLang="en-US" smtClean="0"/>
-              <a:t>2026-03-26</a:t>
+              <a:t>2026-03-30</a:t>
             </a:fld>
             <a:endParaRPr lang="ko-KR" altLang="en-US"/>
           </a:p>
@@ -473,7 +473,7 @@
           <a:p>
             <a:fld id="{E660A6C9-7901-4DAA-A3D7-27A356FD03BF}" type="datetimeFigureOut">
               <a:rPr lang="ko-KR" altLang="en-US" smtClean="0"/>
-              <a:t>2026-03-26</a:t>
+              <a:t>2026-03-30</a:t>
             </a:fld>
             <a:endParaRPr lang="ko-KR" altLang="en-US"/>
           </a:p>
@@ -653,7 +653,7 @@
           <a:p>
             <a:fld id="{E660A6C9-7901-4DAA-A3D7-27A356FD03BF}" type="datetimeFigureOut">
               <a:rPr lang="ko-KR" altLang="en-US" smtClean="0"/>
-              <a:t>2026-03-26</a:t>
+              <a:t>2026-03-30</a:t>
             </a:fld>
             <a:endParaRPr lang="ko-KR" altLang="en-US"/>
           </a:p>
@@ -823,7 +823,7 @@
           <a:p>
             <a:fld id="{E660A6C9-7901-4DAA-A3D7-27A356FD03BF}" type="datetimeFigureOut">
               <a:rPr lang="ko-KR" altLang="en-US" smtClean="0"/>
-              <a:t>2026-03-26</a:t>
+              <a:t>2026-03-30</a:t>
             </a:fld>
             <a:endParaRPr lang="ko-KR" altLang="en-US"/>
           </a:p>
@@ -1069,7 +1069,7 @@
           <a:p>
             <a:fld id="{E660A6C9-7901-4DAA-A3D7-27A356FD03BF}" type="datetimeFigureOut">
               <a:rPr lang="ko-KR" altLang="en-US" smtClean="0"/>
-              <a:t>2026-03-26</a:t>
+              <a:t>2026-03-30</a:t>
             </a:fld>
             <a:endParaRPr lang="ko-KR" altLang="en-US"/>
           </a:p>
@@ -1301,7 +1301,7 @@
           <a:p>
             <a:fld id="{E660A6C9-7901-4DAA-A3D7-27A356FD03BF}" type="datetimeFigureOut">
               <a:rPr lang="ko-KR" altLang="en-US" smtClean="0"/>
-              <a:t>2026-03-26</a:t>
+              <a:t>2026-03-30</a:t>
             </a:fld>
             <a:endParaRPr lang="ko-KR" altLang="en-US"/>
           </a:p>
@@ -1668,7 +1668,7 @@
           <a:p>
             <a:fld id="{E660A6C9-7901-4DAA-A3D7-27A356FD03BF}" type="datetimeFigureOut">
               <a:rPr lang="ko-KR" altLang="en-US" smtClean="0"/>
-              <a:t>2026-03-26</a:t>
+              <a:t>2026-03-30</a:t>
             </a:fld>
             <a:endParaRPr lang="ko-KR" altLang="en-US"/>
           </a:p>
@@ -1786,7 +1786,7 @@
           <a:p>
             <a:fld id="{E660A6C9-7901-4DAA-A3D7-27A356FD03BF}" type="datetimeFigureOut">
               <a:rPr lang="ko-KR" altLang="en-US" smtClean="0"/>
-              <a:t>2026-03-26</a:t>
+              <a:t>2026-03-30</a:t>
             </a:fld>
             <a:endParaRPr lang="ko-KR" altLang="en-US"/>
           </a:p>
@@ -1881,7 +1881,7 @@
           <a:p>
             <a:fld id="{E660A6C9-7901-4DAA-A3D7-27A356FD03BF}" type="datetimeFigureOut">
               <a:rPr lang="ko-KR" altLang="en-US" smtClean="0"/>
-              <a:t>2026-03-26</a:t>
+              <a:t>2026-03-30</a:t>
             </a:fld>
             <a:endParaRPr lang="ko-KR" altLang="en-US"/>
           </a:p>
@@ -2158,7 +2158,7 @@
           <a:p>
             <a:fld id="{E660A6C9-7901-4DAA-A3D7-27A356FD03BF}" type="datetimeFigureOut">
               <a:rPr lang="ko-KR" altLang="en-US" smtClean="0"/>
-              <a:t>2026-03-26</a:t>
+              <a:t>2026-03-30</a:t>
             </a:fld>
             <a:endParaRPr lang="ko-KR" altLang="en-US"/>
           </a:p>
@@ -2411,7 +2411,7 @@
           <a:p>
             <a:fld id="{E660A6C9-7901-4DAA-A3D7-27A356FD03BF}" type="datetimeFigureOut">
               <a:rPr lang="ko-KR" altLang="en-US" smtClean="0"/>
-              <a:t>2026-03-26</a:t>
+              <a:t>2026-03-30</a:t>
             </a:fld>
             <a:endParaRPr lang="ko-KR" altLang="en-US"/>
           </a:p>
@@ -2624,7 +2624,7 @@
           <a:p>
             <a:fld id="{E660A6C9-7901-4DAA-A3D7-27A356FD03BF}" type="datetimeFigureOut">
               <a:rPr lang="ko-KR" altLang="en-US" smtClean="0"/>
-              <a:t>2026-03-26</a:t>
+              <a:t>2026-03-30</a:t>
             </a:fld>
             <a:endParaRPr lang="ko-KR" altLang="en-US"/>
           </a:p>
@@ -12342,7 +12342,7 @@
           <p:cNvPr id="5" name="그림 4">
             <a:extLst>
               <a:ext uri="{FF2B5EF4-FFF2-40B4-BE49-F238E27FC236}">
-                <a16:creationId xmlns:lc="http://schemas.openxmlformats.org/drawingml/2006/lockedCanvas" xmlns:a16="http://schemas.microsoft.com/office/drawing/2014/main" xmlns:wps="http://schemas.microsoft.com/office/word/2010/wordprocessingShape" xmlns:wne="http://schemas.microsoft.com/office/word/2006/wordml" xmlns:wpi="http://schemas.microsoft.com/office/word/2010/wordprocessingInk" xmlns:wpg="http://schemas.microsoft.com/office/word/2010/wordprocessingGroup" xmlns:w16se="http://schemas.microsoft.com/office/word/2015/wordml/symex" xmlns:w16cid="http://schemas.microsoft.com/office/word/2016/wordml/cid" xmlns:w15="http://schemas.microsoft.com/office/word/2012/wordml" xmlns:w14="http://schemas.microsoft.com/office/word/2010/wordml" xmlns:w="http://schemas.openxmlformats.org/wordprocessingml/2006/main" xmlns:w10="urn:schemas-microsoft-com:office:word" xmlns:wp="http://schemas.openxmlformats.org/drawingml/2006/wordprocessingDrawing" xmlns:wp14="http://schemas.microsoft.com/office/word/2010/wordprocessingDrawing" xmlns:v="urn:schemas-microsoft-com:vml" xmlns:m="http://schemas.openxmlformats.org/officeDocument/2006/math" xmlns:o="urn:schemas-microsoft-com:office:office" xmlns:am3d="http://schemas.microsoft.com/office/drawing/2017/model3d" xmlns:aink="http://schemas.microsoft.com/office/drawing/2016/ink" xmlns:mc="http://schemas.openxmlformats.org/markup-compatibility/2006" xmlns:cx8="http://schemas.microsoft.com/office/drawing/2016/5/14/chartex" xmlns:cx7="http://schemas.microsoft.com/office/drawing/2016/5/13/chartex" xmlns:cx6="http://schemas.microsoft.com/office/drawing/2016/5/12/chartex" xmlns:cx5="http://schemas.microsoft.com/office/drawing/2016/5/11/chartex" xmlns:cx4="http://schemas.microsoft.com/office/drawing/2016/5/10/chartex" xmlns:cx3="http://schemas.microsoft.com/office/drawing/2016/5/9/chartex" xmlns:cx2="http://schemas.microsoft.com/office/drawing/2015/10/21/chartex" xmlns:cx1="http://schemas.microsoft.com/office/drawing/2015/9/8/chartex" xmlns:cx="http://schemas.microsoft.com/office/drawing/2014/chartex" xmlns:wpc="http://schemas.microsoft.com/office/word/2010/wordprocessingCanvas" xmlns="" id="{108136A8-A176-4E56-8002-CFDE5DB676B7}"/>
+                <a16:creationId xmlns="" xmlns:wpc="http://schemas.microsoft.com/office/word/2010/wordprocessingCanvas" xmlns:cx="http://schemas.microsoft.com/office/drawing/2014/chartex" xmlns:cx1="http://schemas.microsoft.com/office/drawing/2015/9/8/chartex" xmlns:cx2="http://schemas.microsoft.com/office/drawing/2015/10/21/chartex" xmlns:cx3="http://schemas.microsoft.com/office/drawing/2016/5/9/chartex" xmlns:cx4="http://schemas.microsoft.com/office/drawing/2016/5/10/chartex" xmlns:cx5="http://schemas.microsoft.com/office/drawing/2016/5/11/chartex" xmlns:cx6="http://schemas.microsoft.com/office/drawing/2016/5/12/chartex" xmlns:cx7="http://schemas.microsoft.com/office/drawing/2016/5/13/chartex" xmlns:cx8="http://schemas.microsoft.com/office/drawing/2016/5/14/chartex" xmlns:mc="http://schemas.openxmlformats.org/markup-compatibility/2006" xmlns:aink="http://schemas.microsoft.com/office/drawing/2016/ink" xmlns:am3d="http://schemas.microsoft.com/office/drawing/2017/model3d" xmlns:o="urn:schemas-microsoft-com:office:office" xmlns:m="http://schemas.openxmlformats.org/officeDocument/2006/math" xmlns:v="urn:schemas-microsoft-com:vml" xmlns:wp14="http://schemas.microsoft.com/office/word/2010/wordprocessingDrawing" xmlns:wp="http://schemas.openxmlformats.org/drawingml/2006/wordprocessingDrawing" xmlns:w10="urn:schemas-microsoft-com:office:word" xmlns:w="http://schemas.openxmlformats.org/wordprocessingml/2006/main" xmlns:w14="http://schemas.microsoft.com/office/word/2010/wordml" xmlns:w15="http://schemas.microsoft.com/office/word/2012/wordml" xmlns:w16cid="http://schemas.microsoft.com/office/word/2016/wordml/cid" xmlns:w16se="http://schemas.microsoft.com/office/word/2015/wordml/symex" xmlns:wpg="http://schemas.microsoft.com/office/word/2010/wordprocessingGroup" xmlns:wpi="http://schemas.microsoft.com/office/word/2010/wordprocessingInk" xmlns:wne="http://schemas.microsoft.com/office/word/2006/wordml" xmlns:wps="http://schemas.microsoft.com/office/word/2010/wordprocessingShape" xmlns:a16="http://schemas.microsoft.com/office/drawing/2014/main" xmlns:lc="http://schemas.openxmlformats.org/drawingml/2006/lockedCanvas" id="{108136A8-A176-4E56-8002-CFDE5DB676B7}"/>
               </a:ext>
             </a:extLst>
           </p:cNvPr>
